--- a/metrics-numbers-unit-analysis.pptx
+++ b/metrics-numbers-unit-analysis.pptx
@@ -2708,7 +2708,7 @@
                 <a:ea typeface="Calibri" pitchFamily="34" charset="-122"/>
                 <a:cs typeface="Calibri" pitchFamily="34" charset="-120"/>
               </a:rPr>
-              <a:t>SCIENCE FOUNDATIONS · UNIT 1</a:t>
+              <a:t>SCIENCE FOUNDATIONS</a:t>
             </a:r>
             <a:endParaRPr lang="en-US" sz="1400" dirty="0"/>
           </a:p>

--- a/metrics-numbers-unit-analysis.pptx
+++ b/metrics-numbers-unit-analysis.pptx
@@ -11167,7 +11167,7 @@
               <a:buNone/>
             </a:pPr>
             <a:r>
-              <a:rPr lang="en-US" sz="4400" b="1" dirty="0">
+              <a:rPr lang="en-US" sz="4000" b="1" dirty="0">
                 <a:solidFill>
                   <a:srgbClr val="FFFFFF"/>
                 </a:solidFill>
@@ -11177,14 +11177,14 @@
               </a:rPr>
               <a:t>Numbers Are the</a:t>
             </a:r>
-            <a:endParaRPr lang="en-US" sz="4400" dirty="0"/>
+            <a:endParaRPr lang="en-US" sz="4000" dirty="0"/>
           </a:p>
           <a:p>
             <a:pPr indent="0" marL="0">
               <a:buNone/>
             </a:pPr>
             <a:r>
-              <a:rPr lang="en-US" sz="4400" b="1" dirty="0">
+              <a:rPr lang="en-US" sz="4000" b="1" dirty="0">
                 <a:solidFill>
                   <a:srgbClr val="FFFFFF"/>
                 </a:solidFill>
@@ -11192,9 +11192,9 @@
                 <a:ea typeface="Cambria" pitchFamily="34" charset="-122"/>
                 <a:cs typeface="Cambria" pitchFamily="34" charset="-120"/>
               </a:rPr>
-              <a:t>Language of Science</a:t>
-            </a:r>
-            <a:endParaRPr lang="en-US" sz="4400" dirty="0"/>
+              <a:t>Language of Science and Engineering</a:t>
+            </a:r>
+            <a:endParaRPr lang="en-US" sz="4000" dirty="0"/>
           </a:p>
         </p:txBody>
       </p:sp>
@@ -12345,12 +12345,117 @@
         </p:nvSpPr>
         <p:spPr>
           <a:xfrm>
-            <a:off x="548640" y="2011680"/>
-            <a:ext cx="5486400" cy="4114800"/>
+            <a:off x="548640" y="1828800"/>
+            <a:ext cx="11155680" cy="1828800"/>
           </a:xfrm>
           <a:prstGeom prst="roundRect">
             <a:avLst>
-              <a:gd name="adj" fmla="val 3333"/>
+              <a:gd name="adj" fmla="val 4000"/>
+            </a:avLst>
+          </a:prstGeom>
+          <a:solidFill>
+            <a:srgbClr val="F7F9FC"/>
+          </a:solidFill>
+          <a:ln w="25400">
+            <a:solidFill>
+              <a:srgbClr val="FFC107"/>
+            </a:solidFill>
+            <a:prstDash val="solid"/>
+          </a:ln>
+        </p:spPr>
+      </p:sp>
+      <p:sp>
+        <p:nvSpPr>
+          <p:cNvPr id="6" name="Text 4"/>
+          <p:cNvSpPr/>
+          <p:nvPr/>
+        </p:nvSpPr>
+        <p:spPr>
+          <a:xfrm>
+            <a:off x="822960" y="1965960"/>
+            <a:ext cx="2743200" cy="274320"/>
+          </a:xfrm>
+          <a:prstGeom prst="rect">
+            <a:avLst/>
+          </a:prstGeom>
+          <a:noFill/>
+          <a:ln/>
+        </p:spPr>
+        <p:txBody>
+          <a:bodyPr wrap="square" rtlCol="0" anchor="ctr"/>
+          <a:lstStyle/>
+          <a:p>
+            <a:pPr indent="0" marL="0">
+              <a:buNone/>
+            </a:pPr>
+            <a:r>
+              <a:rPr lang="en-US" sz="1200" b="1" spc="300" kern="0" dirty="0">
+                <a:solidFill>
+                  <a:srgbClr val="B8860B"/>
+                </a:solidFill>
+                <a:latin typeface="Calibri" pitchFamily="34" charset="0"/>
+                <a:ea typeface="Calibri" pitchFamily="34" charset="-122"/>
+                <a:cs typeface="Calibri" pitchFamily="34" charset="-120"/>
+              </a:rPr>
+              <a:t>DEFINITION</a:t>
+            </a:r>
+            <a:endParaRPr lang="en-US" sz="1200" dirty="0"/>
+          </a:p>
+        </p:txBody>
+      </p:sp>
+      <p:sp>
+        <p:nvSpPr>
+          <p:cNvPr id="7" name="Text 5"/>
+          <p:cNvSpPr/>
+          <p:nvPr/>
+        </p:nvSpPr>
+        <p:spPr>
+          <a:xfrm>
+            <a:off x="822960" y="2286000"/>
+            <a:ext cx="10607040" cy="1280160"/>
+          </a:xfrm>
+          <a:prstGeom prst="rect">
+            <a:avLst/>
+          </a:prstGeom>
+          <a:noFill/>
+          <a:ln/>
+        </p:spPr>
+        <p:txBody>
+          <a:bodyPr wrap="square" rtlCol="0" anchor="ctr"/>
+          <a:lstStyle/>
+          <a:p>
+            <a:pPr indent="0" marL="0">
+              <a:buNone/>
+            </a:pPr>
+            <a:r>
+              <a:rPr lang="en-US" sz="2000" i="1" dirty="0">
+                <a:solidFill>
+                  <a:srgbClr val="1F2937"/>
+                </a:solidFill>
+                <a:latin typeface="Calibri" pitchFamily="34" charset="0"/>
+                <a:ea typeface="Calibri" pitchFamily="34" charset="-122"/>
+                <a:cs typeface="Calibri" pitchFamily="34" charset="-120"/>
+              </a:rPr>
+              <a:t>Science is a systematic process of questioning, understanding, and explaining the natural world through observation, experimentation, and analysis, guided by logical reasoning.</a:t>
+            </a:r>
+            <a:endParaRPr lang="en-US" sz="2000" dirty="0"/>
+          </a:p>
+        </p:txBody>
+      </p:sp>
+      <p:sp>
+        <p:nvSpPr>
+          <p:cNvPr id="8" name="Shape 6"/>
+          <p:cNvSpPr/>
+          <p:nvPr/>
+        </p:nvSpPr>
+        <p:spPr>
+          <a:xfrm>
+            <a:off x="548640" y="3840480"/>
+            <a:ext cx="5486400" cy="2514600"/>
+          </a:xfrm>
+          <a:prstGeom prst="roundRect">
+            <a:avLst>
+              <a:gd name="adj" fmla="val 5455"/>
             </a:avLst>
           </a:prstGeom>
           <a:solidFill>
@@ -12366,13 +12471,13 @@
       </p:sp>
       <p:sp>
         <p:nvSpPr>
-          <p:cNvPr id="6" name="Shape 4"/>
-          <p:cNvSpPr/>
-          <p:nvPr/>
-        </p:nvSpPr>
-        <p:spPr>
-          <a:xfrm>
-            <a:off x="822960" y="2286000"/>
+          <p:cNvPr id="9" name="Shape 7"/>
+          <p:cNvSpPr/>
+          <p:nvPr/>
+        </p:nvSpPr>
+        <p:spPr>
+          <a:xfrm>
+            <a:off x="822960" y="4114800"/>
             <a:ext cx="640080" cy="640080"/>
           </a:xfrm>
           <a:prstGeom prst="ellipse">
@@ -12386,13 +12491,13 @@
       </p:sp>
       <p:sp>
         <p:nvSpPr>
-          <p:cNvPr id="7" name="Text 5"/>
-          <p:cNvSpPr/>
-          <p:nvPr/>
-        </p:nvSpPr>
-        <p:spPr>
-          <a:xfrm>
-            <a:off x="822960" y="2286000"/>
+          <p:cNvPr id="10" name="Text 8"/>
+          <p:cNvSpPr/>
+          <p:nvPr/>
+        </p:nvSpPr>
+        <p:spPr>
+          <a:xfrm>
+            <a:off x="822960" y="4114800"/>
             <a:ext cx="640080" cy="640080"/>
           </a:xfrm>
           <a:prstGeom prst="rect">
@@ -12425,13 +12530,13 @@
       </p:sp>
       <p:sp>
         <p:nvSpPr>
-          <p:cNvPr id="8" name="Text 6"/>
-          <p:cNvSpPr/>
-          <p:nvPr/>
-        </p:nvSpPr>
-        <p:spPr>
-          <a:xfrm>
-            <a:off x="1645920" y="2286000"/>
+          <p:cNvPr id="11" name="Text 9"/>
+          <p:cNvSpPr/>
+          <p:nvPr/>
+        </p:nvSpPr>
+        <p:spPr>
+          <a:xfrm>
+            <a:off x="1645920" y="4114800"/>
             <a:ext cx="4114800" cy="457200"/>
           </a:xfrm>
           <a:prstGeom prst="rect">
@@ -12464,14 +12569,14 @@
       </p:sp>
       <p:sp>
         <p:nvSpPr>
-          <p:cNvPr id="9" name="Text 7"/>
-          <p:cNvSpPr/>
-          <p:nvPr/>
-        </p:nvSpPr>
-        <p:spPr>
-          <a:xfrm>
-            <a:off x="914400" y="3017520"/>
-            <a:ext cx="4754880" cy="2880360"/>
+          <p:cNvPr id="12" name="Text 10"/>
+          <p:cNvSpPr/>
+          <p:nvPr/>
+        </p:nvSpPr>
+        <p:spPr>
+          <a:xfrm>
+            <a:off x="914400" y="4846320"/>
+            <a:ext cx="4754880" cy="1280160"/>
           </a:xfrm>
           <a:prstGeom prst="rect">
             <a:avLst/>
@@ -12503,18 +12608,18 @@
       </p:sp>
       <p:sp>
         <p:nvSpPr>
-          <p:cNvPr id="10" name="Shape 8"/>
-          <p:cNvSpPr/>
-          <p:nvPr/>
-        </p:nvSpPr>
-        <p:spPr>
-          <a:xfrm>
-            <a:off x="6217920" y="2011680"/>
-            <a:ext cx="5486400" cy="4114800"/>
+          <p:cNvPr id="13" name="Shape 11"/>
+          <p:cNvSpPr/>
+          <p:nvPr/>
+        </p:nvSpPr>
+        <p:spPr>
+          <a:xfrm>
+            <a:off x="6217920" y="3840480"/>
+            <a:ext cx="5486400" cy="2514600"/>
           </a:xfrm>
           <a:prstGeom prst="roundRect">
             <a:avLst>
-              <a:gd name="adj" fmla="val 3333"/>
+              <a:gd name="adj" fmla="val 5455"/>
             </a:avLst>
           </a:prstGeom>
           <a:solidFill>
@@ -12530,13 +12635,13 @@
       </p:sp>
       <p:sp>
         <p:nvSpPr>
-          <p:cNvPr id="11" name="Shape 9"/>
-          <p:cNvSpPr/>
-          <p:nvPr/>
-        </p:nvSpPr>
-        <p:spPr>
-          <a:xfrm>
-            <a:off x="6492240" y="2286000"/>
+          <p:cNvPr id="14" name="Shape 12"/>
+          <p:cNvSpPr/>
+          <p:nvPr/>
+        </p:nvSpPr>
+        <p:spPr>
+          <a:xfrm>
+            <a:off x="6492240" y="4114800"/>
             <a:ext cx="640080" cy="640080"/>
           </a:xfrm>
           <a:prstGeom prst="ellipse">
@@ -12550,13 +12655,13 @@
       </p:sp>
       <p:sp>
         <p:nvSpPr>
-          <p:cNvPr id="12" name="Text 10"/>
-          <p:cNvSpPr/>
-          <p:nvPr/>
-        </p:nvSpPr>
-        <p:spPr>
-          <a:xfrm>
-            <a:off x="6492240" y="2286000"/>
+          <p:cNvPr id="15" name="Text 13"/>
+          <p:cNvSpPr/>
+          <p:nvPr/>
+        </p:nvSpPr>
+        <p:spPr>
+          <a:xfrm>
+            <a:off x="6492240" y="4114800"/>
             <a:ext cx="640080" cy="640080"/>
           </a:xfrm>
           <a:prstGeom prst="rect">
@@ -12589,13 +12694,13 @@
       </p:sp>
       <p:sp>
         <p:nvSpPr>
-          <p:cNvPr id="13" name="Text 11"/>
-          <p:cNvSpPr/>
-          <p:nvPr/>
-        </p:nvSpPr>
-        <p:spPr>
-          <a:xfrm>
-            <a:off x="7315200" y="2286000"/>
+          <p:cNvPr id="16" name="Text 14"/>
+          <p:cNvSpPr/>
+          <p:nvPr/>
+        </p:nvSpPr>
+        <p:spPr>
+          <a:xfrm>
+            <a:off x="7315200" y="4114800"/>
             <a:ext cx="4114800" cy="457200"/>
           </a:xfrm>
           <a:prstGeom prst="rect">
@@ -12628,14 +12733,14 @@
       </p:sp>
       <p:sp>
         <p:nvSpPr>
-          <p:cNvPr id="14" name="Text 12"/>
-          <p:cNvSpPr/>
-          <p:nvPr/>
-        </p:nvSpPr>
-        <p:spPr>
-          <a:xfrm>
-            <a:off x="6583680" y="3017520"/>
-            <a:ext cx="4754880" cy="2880360"/>
+          <p:cNvPr id="17" name="Text 15"/>
+          <p:cNvSpPr/>
+          <p:nvPr/>
+        </p:nvSpPr>
+        <p:spPr>
+          <a:xfrm>
+            <a:off x="6583680" y="4846320"/>
+            <a:ext cx="4754880" cy="1280160"/>
           </a:xfrm>
           <a:prstGeom prst="rect">
             <a:avLst/>
@@ -12730,7 +12835,7 @@
       </p:sp>
       <p:sp>
         <p:nvSpPr>
-          <p:cNvPr id="15" name="Text 13"/>
+          <p:cNvPr id="18" name="Text 16"/>
           <p:cNvSpPr/>
           <p:nvPr/>
         </p:nvSpPr>
@@ -12769,7 +12874,7 @@
       </p:sp>
       <p:sp>
         <p:nvSpPr>
-          <p:cNvPr id="16" name="Text 14"/>
+          <p:cNvPr id="19" name="Text 17"/>
           <p:cNvSpPr/>
           <p:nvPr/>
         </p:nvSpPr>
@@ -16321,7 +16426,7 @@
         <p:spPr>
           <a:xfrm>
             <a:off x="548640" y="2743200"/>
-            <a:ext cx="10972800" cy="2286000"/>
+            <a:ext cx="10972800" cy="1737360"/>
           </a:xfrm>
           <a:prstGeom prst="rect">
             <a:avLst/>
@@ -16376,7 +16481,7 @@
         </p:nvSpPr>
         <p:spPr>
           <a:xfrm>
-            <a:off x="548640" y="5120640"/>
+            <a:off x="548640" y="4526280"/>
             <a:ext cx="640080" cy="73152"/>
           </a:xfrm>
           <a:prstGeom prst="rect">
@@ -16387,6 +16492,65 @@
           </a:solidFill>
           <a:ln/>
         </p:spPr>
+      </p:sp>
+      <p:sp>
+        <p:nvSpPr>
+          <p:cNvPr id="5" name="Text 3"/>
+          <p:cNvSpPr/>
+          <p:nvPr/>
+        </p:nvSpPr>
+        <p:spPr>
+          <a:xfrm>
+            <a:off x="548640" y="4754880"/>
+            <a:ext cx="10972800" cy="1371600"/>
+          </a:xfrm>
+          <a:prstGeom prst="rect">
+            <a:avLst/>
+          </a:prstGeom>
+          <a:noFill/>
+          <a:ln/>
+        </p:spPr>
+        <p:txBody>
+          <a:bodyPr wrap="square" rtlCol="0" anchor="ctr"/>
+          <a:lstStyle/>
+          <a:p>
+            <a:pPr indent="0" marL="0">
+              <a:buNone/>
+            </a:pPr>
+            <a:r>
+              <a:rPr lang="en-US" sz="1600" b="1" i="1" dirty="0">
+                <a:solidFill>
+                  <a:srgbClr val="FFC107"/>
+                </a:solidFill>
+                <a:latin typeface="Calibri" pitchFamily="34" charset="0"/>
+                <a:ea typeface="Calibri" pitchFamily="34" charset="-122"/>
+                <a:cs typeface="Calibri" pitchFamily="34" charset="-120"/>
+              </a:rPr>
+              <a:t>SI = Système International d'Unités</a:t>
+            </a:r>
+            <a:pPr indent="0" marL="0">
+              <a:buNone/>
+            </a:pPr>
+            <a:endParaRPr lang="en-US" sz="1600" dirty="0"/>
+          </a:p>
+          <a:p>
+            <a:pPr indent="0" marL="0">
+              <a:buNone/>
+            </a:pPr>
+            <a:r>
+              <a:rPr lang="en-US" sz="1600" i="1" dirty="0">
+                <a:solidFill>
+                  <a:srgbClr val="FFFFFF"/>
+                </a:solidFill>
+                <a:latin typeface="Calibri" pitchFamily="34" charset="0"/>
+                <a:ea typeface="Calibri" pitchFamily="34" charset="-122"/>
+                <a:cs typeface="Calibri" pitchFamily="34" charset="-120"/>
+              </a:rPr>
+              <a:t>In English: the International System of Units — the modern metric system used by scientists, engineers, and most countries worldwide.</a:t>
+            </a:r>
+            <a:endParaRPr lang="en-US" sz="1600" dirty="0"/>
+          </a:p>
+        </p:txBody>
       </p:sp>
     </p:spTree>
   </p:cSld>
